--- a/public/pitch-decks/design-partner/pptx/19-salesforce-integration.pptx
+++ b/public/pitch-decks/design-partner/pptx/19-salesforce-integration.pptx
@@ -1783,7 +1783,7 @@
                   <a:srgbClr val="8B8FA3"/>
                 </a:solidFill>
               </a:rPr>
-              <a:t>Decision Crisis Immunization Infrastructure</a:t>
+              <a:t>Decision Evidence Infrastructure for AI Systems</a:t>
             </a:r>
             <a:endParaRPr lang="en-US" sz="1200" dirty="0"/>
           </a:p>
@@ -2279,7 +2279,7 @@
                   <a:srgbClr val="FFFFFF"/>
                 </a:solidFill>
               </a:rPr>
-              <a:t>Decision Crisis Immunization Infrastructure</a:t>
+              <a:t>Decision Evidence Infrastructure for AI Systems</a:t>
             </a:r>
             <a:endParaRPr lang="en-US" sz="2400" dirty="0"/>
           </a:p>
@@ -3764,6 +3764,10 @@
           </a:solidFill>
           <a:ln/>
         </p:spPr>
+        <p:txBody>
+          <a:bodyPr/>
+          <a:p/>
+        </p:txBody>
       </p:sp>
       <p:sp>
         <p:nvSpPr>
@@ -3858,6 +3862,10 @@
           </a:solidFill>
           <a:ln/>
         </p:spPr>
+        <p:txBody>
+          <a:bodyPr/>
+          <a:p/>
+        </p:txBody>
       </p:sp>
       <p:sp>
         <p:nvSpPr>
@@ -3952,6 +3960,10 @@
           </a:solidFill>
           <a:ln/>
         </p:spPr>
+        <p:txBody>
+          <a:bodyPr/>
+          <a:p/>
+        </p:txBody>
       </p:sp>
       <p:sp>
         <p:nvSpPr>
@@ -4046,6 +4058,10 @@
           </a:solidFill>
           <a:ln/>
         </p:spPr>
+        <p:txBody>
+          <a:bodyPr/>
+          <a:p/>
+        </p:txBody>
       </p:sp>
       <p:sp>
         <p:nvSpPr>
